--- a/Objetivos Prioritarios/Plantillas/plantilla_base_vicefiscalia.pptx
+++ b/Objetivos Prioritarios/Plantillas/plantilla_base_vicefiscalia.pptx
@@ -3614,7 +3614,7 @@
           <p:nvPr>
             <p:extLst>
               <p:ext uri="{D42A27DB-BD31-4B8C-83A1-F6EECF244321}">
-                <p14:modId xmlns:p14="http://schemas.microsoft.com/office/powerpoint/2010/main" val="3793104443"/>
+                <p14:modId xmlns:p14="http://schemas.microsoft.com/office/powerpoint/2010/main" val="3363756650"/>
               </p:ext>
             </p:extLst>
           </p:nvPr>
@@ -4247,12 +4247,12 @@
                     <a:bodyPr/>
                     <a:lstStyle/>
                     <a:p>
-                      <a:pPr marL="342900" indent="-342900" algn="just">
+                      <a:pPr marL="0" indent="0" algn="just">
                         <a:buFont typeface="Arial" panose="020B0604020202020204" pitchFamily="34" charset="0"/>
-                        <a:buChar char="•"/>
+                        <a:buNone/>
                       </a:pPr>
                       <a:r>
-                        <a:rPr lang="es-MX" sz="1200" b="0" i="0" u="none" strike="noStrike" kern="1200" cap="none" spc="0" baseline="0" dirty="0">
+                        <a:rPr lang="es-MX" sz="1200" b="0" i="0" u="none" strike="noStrike" kern="1200" cap="none" spc="0" baseline="0">
                           <a:solidFill>
                             <a:schemeClr val="bg2">
                               <a:lumMod val="10000"/>
@@ -4264,8 +4264,20 @@
                           <a:cs typeface="+mn-cs"/>
                           <a:sym typeface="Helvetica Neue"/>
                         </a:rPr>
-                        <a:t>Autor intelectual del ataque perpetrado en contra de elementos de la Comisaria General el día 22 de septiembre del año 2022, en las inmediaciones de Fracc. Valle del Real, Rincón de Romos, Aguascalientes. </a:t>
+                        <a:t>[C13]</a:t>
                       </a:r>
+                      <a:endParaRPr lang="es-MX" sz="1200" b="0" i="0" u="none" strike="noStrike" kern="1200" cap="none" spc="0" baseline="0" dirty="0">
+                        <a:solidFill>
+                          <a:schemeClr val="bg2">
+                            <a:lumMod val="10000"/>
+                          </a:schemeClr>
+                        </a:solidFill>
+                        <a:uFillTx/>
+                        <a:latin typeface="+mj-lt"/>
+                        <a:ea typeface="+mn-ea"/>
+                        <a:cs typeface="+mn-cs"/>
+                        <a:sym typeface="Helvetica Neue"/>
+                      </a:endParaRPr>
                     </a:p>
                   </a:txBody>
                   <a:tcPr marL="45720" marR="45720" marT="22860" marB="22860">
@@ -4587,7 +4599,7 @@
                           <a:cs typeface="+mn-cs"/>
                           <a:sym typeface="Helvetica Neue"/>
                         </a:rPr>
-                        <a:t>[C9]</a:t>
+                        <a:t>[C5]</a:t>
                       </a:r>
                       <a:endParaRPr kumimoji="0" lang="es-MX" sz="1200" b="0" i="0" u="none" strike="noStrike" cap="none" spc="0" normalizeH="0" dirty="0">
                         <a:ln>
